--- a/decks/triple-space/triple-space_ch4_red-shift.pptx
+++ b/decks/triple-space/triple-space_ch4_red-shift.pptx
@@ -124,50 +124,50 @@
   <p:extLst>
     <p:ext uri="{521415D9-36F7-43E2-AB2F-B90AF26B5E84}">
       <p14:sectionLst xmlns:p14="http://schemas.microsoft.com/office/powerpoint/2010/main">
-        <p14:section name="Opening" id="{f77db3d1-5960-5855-126d-23dcff1ddeb9}">
+        <p14:section name="Opening" id="{7e2faf9c-0d9d-6415-f4b2-4e860ce14ab1}">
           <p14:sldIdLst>
             <p14:sldId id="256"/>
           </p14:sldIdLst>
         </p14:section>
-        <p14:section name="Gate" id="{f947d465-752a-ed32-ec35-996b3d618a2c}">
+        <p14:section name="Gate" id="{c2fca19d-3bce-cedc-2f83-4b2072969b15}">
           <p14:sldIdLst>
             <p14:sldId id="257"/>
             <p14:sldId id="258"/>
             <p14:sldId id="259"/>
           </p14:sldIdLst>
         </p14:section>
-        <p14:section name="Pre-teach" id="{206d7e3c-89cb-fb51-c0c1-be22d5814544}">
+        <p14:section name="Pre-teach" id="{0e7e3cff-5162-4992-0471-a88e9af4410a}">
           <p14:sldIdLst>
             <p14:sldId id="260"/>
             <p14:sldId id="261"/>
           </p14:sldIdLst>
         </p14:section>
-        <p14:section name="Read-along" id="{9d05a325-6fd7-168b-66b7-000bccd69026}">
+        <p14:section name="Read-along" id="{a6c2e2c3-edca-179e-49f8-918902c1957d}">
           <p14:sldIdLst>
             <p14:sldId id="262"/>
             <p14:sldId id="263"/>
           </p14:sldIdLst>
         </p14:section>
-        <p14:section name="Teach" id="{d2e8899f-c849-6307-2e5a-bc5fcaa33ed7}">
+        <p14:section name="Teach" id="{6812175e-a423-5f4d-f53d-897cf1401dd4}">
           <p14:sldIdLst>
             <p14:sldId id="264"/>
             <p14:sldId id="265"/>
             <p14:sldId id="266"/>
           </p14:sldIdLst>
         </p14:section>
-        <p14:section name="Routes" id="{a7f9129b-2b96-fe9f-69b4-b39fbc057e5f}">
+        <p14:section name="Routes" id="{77c40c92-e4ea-cd7b-3792-1e0c7f803bbf}">
           <p14:sldIdLst>
             <p14:sldId id="267"/>
             <p14:sldId id="268"/>
             <p14:sldId id="269"/>
           </p14:sldIdLst>
         </p14:section>
-        <p14:section name="Close" id="{59afc399-d65e-89fd-bced-602843ad534a}">
+        <p14:section name="Close" id="{61aa20f5-c30f-2a9c-c6d9-5bc82c33cf64}">
           <p14:sldIdLst>
             <p14:sldId id="270"/>
           </p14:sldIdLst>
         </p14:section>
-        <p14:section name="Answers" id="{61dbd394-03b7-bda6-f9ac-feeb9c3abbf5}">
+        <p14:section name="Answers" id="{75a5d2b9-b62a-e23f-e2f5-ffc084b2928b}">
           <p14:sldIdLst>
             <p14:sldId id="271"/>
             <p14:sldId id="272"/>
